--- a/record-tutorial-ai-agentic-dbt-development/vids/s00-welcome.pptx
+++ b/record-tutorial-ai-agentic-dbt-development/vids/s00-welcome.pptx
@@ -514,7 +514,7 @@
           <a:lstStyle/>
           <a:p>
             <a:r>
-              <a:t>Welcome to AI agentic dbt development. In this crash course we build one real dbt project, from an empty folder to production patterns, using Rosetta dbt Studio and its built-in AI agent. All you need is basic SQL.</a:t>
+              <a:t>Welcome to agentic dbt development. In this crash course we build one real dbt project with an AI agent, from an empty folder to production patterns, using Rosetta dbt Studio. All you need is basic SQL.</a:t>
             </a:r>
           </a:p>
         </p:txBody>
